--- a/FA_BiLSTM_网络结构图_优化版.pptx
+++ b/FA_BiLSTM_网络结构图_优化版.pptx
@@ -302,7 +302,7 @@
           <a:p>
             <a:fld id="{5BCAD085-E8A6-8845-BD4E-CB4CCA059FC4}" type="datetimeFigureOut">
               <a:rPr lang="en-US" smtClean="0"/>
-              <a:t>4/4/2026</a:t>
+              <a:t>4/5/2026</a:t>
             </a:fld>
             <a:endParaRPr lang="en-US"/>
           </a:p>
@@ -470,7 +470,7 @@
           <a:p>
             <a:fld id="{5BCAD085-E8A6-8845-BD4E-CB4CCA059FC4}" type="datetimeFigureOut">
               <a:rPr lang="en-US" smtClean="0"/>
-              <a:t>4/4/2026</a:t>
+              <a:t>4/5/2026</a:t>
             </a:fld>
             <a:endParaRPr lang="en-US"/>
           </a:p>
@@ -648,7 +648,7 @@
           <a:p>
             <a:fld id="{5BCAD085-E8A6-8845-BD4E-CB4CCA059FC4}" type="datetimeFigureOut">
               <a:rPr lang="en-US" smtClean="0"/>
-              <a:t>4/4/2026</a:t>
+              <a:t>4/5/2026</a:t>
             </a:fld>
             <a:endParaRPr lang="en-US"/>
           </a:p>
@@ -816,7 +816,7 @@
           <a:p>
             <a:fld id="{5BCAD085-E8A6-8845-BD4E-CB4CCA059FC4}" type="datetimeFigureOut">
               <a:rPr lang="en-US" smtClean="0"/>
-              <a:t>4/4/2026</a:t>
+              <a:t>4/5/2026</a:t>
             </a:fld>
             <a:endParaRPr lang="en-US"/>
           </a:p>
@@ -1061,7 +1061,7 @@
           <a:p>
             <a:fld id="{5BCAD085-E8A6-8845-BD4E-CB4CCA059FC4}" type="datetimeFigureOut">
               <a:rPr lang="en-US" smtClean="0"/>
-              <a:t>4/4/2026</a:t>
+              <a:t>4/5/2026</a:t>
             </a:fld>
             <a:endParaRPr lang="en-US"/>
           </a:p>
@@ -1346,7 +1346,7 @@
           <a:p>
             <a:fld id="{5BCAD085-E8A6-8845-BD4E-CB4CCA059FC4}" type="datetimeFigureOut">
               <a:rPr lang="en-US" smtClean="0"/>
-              <a:t>4/4/2026</a:t>
+              <a:t>4/5/2026</a:t>
             </a:fld>
             <a:endParaRPr lang="en-US"/>
           </a:p>
@@ -1765,7 +1765,7 @@
           <a:p>
             <a:fld id="{5BCAD085-E8A6-8845-BD4E-CB4CCA059FC4}" type="datetimeFigureOut">
               <a:rPr lang="en-US" smtClean="0"/>
-              <a:t>4/4/2026</a:t>
+              <a:t>4/5/2026</a:t>
             </a:fld>
             <a:endParaRPr lang="en-US"/>
           </a:p>
@@ -1882,7 +1882,7 @@
           <a:p>
             <a:fld id="{5BCAD085-E8A6-8845-BD4E-CB4CCA059FC4}" type="datetimeFigureOut">
               <a:rPr lang="en-US" smtClean="0"/>
-              <a:t>4/4/2026</a:t>
+              <a:t>4/5/2026</a:t>
             </a:fld>
             <a:endParaRPr lang="en-US"/>
           </a:p>
@@ -1977,7 +1977,7 @@
           <a:p>
             <a:fld id="{5BCAD085-E8A6-8845-BD4E-CB4CCA059FC4}" type="datetimeFigureOut">
               <a:rPr lang="en-US" smtClean="0"/>
-              <a:t>4/4/2026</a:t>
+              <a:t>4/5/2026</a:t>
             </a:fld>
             <a:endParaRPr lang="en-US"/>
           </a:p>
@@ -2252,7 +2252,7 @@
           <a:p>
             <a:fld id="{5BCAD085-E8A6-8845-BD4E-CB4CCA059FC4}" type="datetimeFigureOut">
               <a:rPr lang="en-US" smtClean="0"/>
-              <a:t>4/4/2026</a:t>
+              <a:t>4/5/2026</a:t>
             </a:fld>
             <a:endParaRPr lang="en-US"/>
           </a:p>
@@ -2504,7 +2504,7 @@
           <a:p>
             <a:fld id="{5BCAD085-E8A6-8845-BD4E-CB4CCA059FC4}" type="datetimeFigureOut">
               <a:rPr lang="en-US" smtClean="0"/>
-              <a:t>4/4/2026</a:t>
+              <a:t>4/5/2026</a:t>
             </a:fld>
             <a:endParaRPr lang="en-US"/>
           </a:p>
@@ -2715,7 +2715,7 @@
           <a:p>
             <a:fld id="{5BCAD085-E8A6-8845-BD4E-CB4CCA059FC4}" type="datetimeFigureOut">
               <a:rPr lang="en-US" smtClean="0"/>
-              <a:t>4/4/2026</a:t>
+              <a:t>4/5/2026</a:t>
             </a:fld>
             <a:endParaRPr lang="en-US"/>
           </a:p>
@@ -3185,7 +3185,7 @@
         </p:nvSpPr>
         <p:spPr>
           <a:xfrm>
-            <a:off x="7560000" y="153141"/>
+            <a:off x="7560000" y="100800"/>
             <a:ext cx="4248000" cy="216000"/>
           </a:xfrm>
           <a:prstGeom prst="rect">
@@ -3201,74 +3201,14 @@
           <a:p>
             <a:pPr algn="r"/>
             <a:r>
-              <a:rPr sz="1100" b="0" dirty="0" err="1">
+              <a:rPr sz="1100" b="0">
                 <a:solidFill>
                   <a:srgbClr val="E5ECF4"/>
                 </a:solidFill>
                 <a:latin typeface="Microsoft YaHei"/>
               </a:rPr>
-              <a:t>输入序列</a:t>
-            </a:r>
-            <a:r>
-              <a:rPr sz="1100" b="0" dirty="0">
-                <a:solidFill>
-                  <a:srgbClr val="E5ECF4"/>
-                </a:solidFill>
-                <a:latin typeface="Microsoft YaHei"/>
-              </a:rPr>
-              <a:t>  -&gt;  </a:t>
-            </a:r>
-            <a:r>
-              <a:rPr sz="1100" b="0" dirty="0" err="1">
-                <a:solidFill>
-                  <a:srgbClr val="E5ECF4"/>
-                </a:solidFill>
-                <a:latin typeface="Microsoft YaHei"/>
-              </a:rPr>
-              <a:t>时序编码</a:t>
-            </a:r>
-            <a:r>
-              <a:rPr sz="1100" b="0" dirty="0">
-                <a:solidFill>
-                  <a:srgbClr val="E5ECF4"/>
-                </a:solidFill>
-                <a:latin typeface="Microsoft YaHei"/>
-              </a:rPr>
-              <a:t>  -&gt;  </a:t>
-            </a:r>
-            <a:r>
-              <a:rPr sz="1100" b="0" dirty="0" err="1">
-                <a:solidFill>
-                  <a:srgbClr val="E5ECF4"/>
-                </a:solidFill>
-                <a:latin typeface="Microsoft YaHei"/>
-              </a:rPr>
-              <a:t>特征耦合</a:t>
-            </a:r>
-            <a:r>
-              <a:rPr sz="1100" b="0" dirty="0">
-                <a:solidFill>
-                  <a:srgbClr val="E5ECF4"/>
-                </a:solidFill>
-                <a:latin typeface="Microsoft YaHei"/>
-              </a:rPr>
-              <a:t>  -&gt;  </a:t>
-            </a:r>
-            <a:r>
-              <a:rPr sz="1100" b="0" dirty="0" err="1">
-                <a:solidFill>
-                  <a:srgbClr val="E5ECF4"/>
-                </a:solidFill>
-                <a:latin typeface="Microsoft YaHei"/>
-              </a:rPr>
-              <a:t>分类输出</a:t>
-            </a:r>
-            <a:endParaRPr sz="1100" b="0" dirty="0">
-              <a:solidFill>
-                <a:srgbClr val="E5ECF4"/>
-              </a:solidFill>
-              <a:latin typeface="Microsoft YaHei"/>
-            </a:endParaRPr>
+              <a:t>输入序列  -&gt;  时序编码  -&gt;  特征耦合  -&gt;  分类输出</a:t>
+            </a:r>
           </a:p>
         </p:txBody>
       </p:sp>
@@ -3280,7 +3220,7 @@
         </p:nvSpPr>
         <p:spPr>
           <a:xfrm>
-            <a:off x="432000" y="1572981"/>
+            <a:off x="432000" y="1318538"/>
             <a:ext cx="1655999" cy="792000"/>
           </a:xfrm>
           <a:prstGeom prst="roundRect">
@@ -3346,7 +3286,7 @@
         </p:nvSpPr>
         <p:spPr>
           <a:xfrm>
-            <a:off x="432000" y="1356981"/>
+            <a:off x="432000" y="1102538"/>
             <a:ext cx="324000" cy="324000"/>
           </a:xfrm>
           <a:prstGeom prst="ellipse">
@@ -3400,7 +3340,7 @@
         </p:nvSpPr>
         <p:spPr>
           <a:xfrm>
-            <a:off x="2520000" y="1572981"/>
+            <a:off x="2520000" y="1318538"/>
             <a:ext cx="1655999" cy="792000"/>
           </a:xfrm>
           <a:prstGeom prst="roundRect">
@@ -3466,7 +3406,7 @@
         </p:nvSpPr>
         <p:spPr>
           <a:xfrm>
-            <a:off x="2520000" y="1356981"/>
+            <a:off x="2520000" y="1102538"/>
             <a:ext cx="324000" cy="324000"/>
           </a:xfrm>
           <a:prstGeom prst="ellipse">
@@ -3520,7 +3460,7 @@
         </p:nvSpPr>
         <p:spPr>
           <a:xfrm>
-            <a:off x="4608000" y="1194981"/>
+            <a:off x="4608000" y="940538"/>
             <a:ext cx="1512000" cy="630000"/>
           </a:xfrm>
           <a:prstGeom prst="roundRect">
@@ -3586,7 +3526,7 @@
         </p:nvSpPr>
         <p:spPr>
           <a:xfrm>
-            <a:off x="4608000" y="969981"/>
+            <a:off x="4608000" y="724538"/>
             <a:ext cx="324000" cy="324000"/>
           </a:xfrm>
           <a:prstGeom prst="ellipse">
@@ -3640,7 +3580,7 @@
         </p:nvSpPr>
         <p:spPr>
           <a:xfrm>
-            <a:off x="4608000" y="2058980"/>
+            <a:off x="4608000" y="1804537"/>
             <a:ext cx="1512000" cy="630000"/>
           </a:xfrm>
           <a:prstGeom prst="roundRect">
@@ -3706,7 +3646,7 @@
         </p:nvSpPr>
         <p:spPr>
           <a:xfrm>
-            <a:off x="4608000" y="1842980"/>
+            <a:off x="4608000" y="1588537"/>
             <a:ext cx="324000" cy="324000"/>
           </a:xfrm>
           <a:prstGeom prst="ellipse">
@@ -3760,7 +3700,7 @@
         </p:nvSpPr>
         <p:spPr>
           <a:xfrm>
-            <a:off x="6588000" y="1572981"/>
+            <a:off x="6588000" y="1318538"/>
             <a:ext cx="1764000" cy="792000"/>
           </a:xfrm>
           <a:prstGeom prst="roundRect">
@@ -3826,7 +3766,7 @@
         </p:nvSpPr>
         <p:spPr>
           <a:xfrm>
-            <a:off x="6588000" y="1356981"/>
+            <a:off x="6588000" y="1102538"/>
             <a:ext cx="324000" cy="324000"/>
           </a:xfrm>
           <a:prstGeom prst="ellipse">
@@ -3880,7 +3820,7 @@
         </p:nvSpPr>
         <p:spPr>
           <a:xfrm>
-            <a:off x="8784000" y="1194981"/>
+            <a:off x="8784000" y="940538"/>
             <a:ext cx="1512000" cy="630000"/>
           </a:xfrm>
           <a:prstGeom prst="roundRect">
@@ -3933,7 +3873,7 @@
                 </a:solidFill>
                 <a:latin typeface="Microsoft YaHei"/>
               </a:rPr>
-              <a:t>weighted_x = α ⊙ x</a:t>
+              <a:t>weighted_x = α ⊙ x_target</a:t>
             </a:r>
           </a:p>
         </p:txBody>
@@ -3946,7 +3886,7 @@
         </p:nvSpPr>
         <p:spPr>
           <a:xfrm>
-            <a:off x="8784000" y="978981"/>
+            <a:off x="8784000" y="724538"/>
             <a:ext cx="324000" cy="324000"/>
           </a:xfrm>
           <a:prstGeom prst="ellipse">
@@ -4000,7 +3940,7 @@
         </p:nvSpPr>
         <p:spPr>
           <a:xfrm>
-            <a:off x="8784000" y="2058980"/>
+            <a:off x="8784000" y="1804537"/>
             <a:ext cx="1512000" cy="630000"/>
           </a:xfrm>
           <a:prstGeom prst="roundRect">
@@ -4041,7 +3981,7 @@
                 </a:solidFill>
                 <a:latin typeface="Microsoft YaHei"/>
               </a:rPr>
-              <a:t>特征融合</a:t>
+              <a:t>融合表示</a:t>
             </a:r>
           </a:p>
           <a:p>
@@ -4053,7 +3993,7 @@
                 </a:solidFill>
                 <a:latin typeface="Microsoft YaHei"/>
               </a:rPr>
-              <a:t>[h, x, weighted_x]</a:t>
+              <a:t>[h_target, x_target, weighted_x]</a:t>
             </a:r>
           </a:p>
         </p:txBody>
@@ -4066,7 +4006,7 @@
         </p:nvSpPr>
         <p:spPr>
           <a:xfrm>
-            <a:off x="10656000" y="1572981"/>
+            <a:off x="10656000" y="1318538"/>
             <a:ext cx="1116000" cy="792000"/>
           </a:xfrm>
           <a:prstGeom prst="roundRect">
@@ -4119,7 +4059,7 @@
                 </a:solidFill>
                 <a:latin typeface="Microsoft YaHei"/>
               </a:rPr>
-              <a:t>MLP + Dropout</a:t>
+              <a:t>FC + ReLU + Dropout</a:t>
             </a:r>
           </a:p>
         </p:txBody>
@@ -4132,7 +4072,7 @@
         </p:nvSpPr>
         <p:spPr>
           <a:xfrm>
-            <a:off x="468000" y="2454981"/>
+            <a:off x="468000" y="2200538"/>
             <a:ext cx="1728000" cy="324000"/>
           </a:xfrm>
           <a:prstGeom prst="rect">
@@ -4168,7 +4108,7 @@
         </p:nvSpPr>
         <p:spPr>
           <a:xfrm>
-            <a:off x="2592000" y="2454981"/>
+            <a:off x="2592000" y="2200538"/>
             <a:ext cx="1548000" cy="251999"/>
           </a:xfrm>
           <a:prstGeom prst="rect">
@@ -4203,8 +4143,8 @@
         </p:nvSpPr>
         <p:spPr>
           <a:xfrm>
-            <a:off x="6623999" y="2454981"/>
-            <a:ext cx="1764000" cy="324000"/>
+            <a:off x="6491692" y="2650847"/>
+            <a:ext cx="2136616" cy="400110"/>
           </a:xfrm>
           <a:prstGeom prst="rect">
             <a:avLst/>
@@ -4219,14 +4159,86 @@
           <a:p>
             <a:pPr algn="ctr"/>
             <a:r>
-              <a:rPr sz="1000" b="0">
+              <a:rPr sz="1000" b="0" dirty="0">
                 <a:solidFill>
                   <a:srgbClr val="63707E"/>
                 </a:solidFill>
                 <a:latin typeface="Microsoft YaHei"/>
               </a:rPr>
-              <a:t>由 h_target 与 x_target 共同计算
-各输入参数的动态权重 α</a:t>
+              <a:t>由 </a:t>
+            </a:r>
+            <a:r>
+              <a:rPr sz="1000" b="0" dirty="0" err="1">
+                <a:solidFill>
+                  <a:srgbClr val="63707E"/>
+                </a:solidFill>
+                <a:latin typeface="Microsoft YaHei"/>
+              </a:rPr>
+              <a:t>h_target</a:t>
+            </a:r>
+            <a:r>
+              <a:rPr sz="1000" b="0" dirty="0">
+                <a:solidFill>
+                  <a:srgbClr val="63707E"/>
+                </a:solidFill>
+                <a:latin typeface="Microsoft YaHei"/>
+              </a:rPr>
+              <a:t> 与 </a:t>
+            </a:r>
+            <a:r>
+              <a:rPr sz="1000" b="0" dirty="0" err="1">
+                <a:solidFill>
+                  <a:srgbClr val="63707E"/>
+                </a:solidFill>
+                <a:latin typeface="Microsoft YaHei"/>
+              </a:rPr>
+              <a:t>x_target</a:t>
+            </a:r>
+            <a:r>
+              <a:rPr sz="1000" b="0" dirty="0">
+                <a:solidFill>
+                  <a:srgbClr val="63707E"/>
+                </a:solidFill>
+                <a:latin typeface="Microsoft YaHei"/>
+              </a:rPr>
+              <a:t> </a:t>
+            </a:r>
+            <a:r>
+              <a:rPr sz="1000" b="0" dirty="0" err="1">
+                <a:solidFill>
+                  <a:srgbClr val="63707E"/>
+                </a:solidFill>
+                <a:latin typeface="Microsoft YaHei"/>
+              </a:rPr>
+              <a:t>共同计算</a:t>
+            </a:r>
+            <a:r>
+              <a:rPr sz="1000" b="0" dirty="0">
+                <a:solidFill>
+                  <a:srgbClr val="63707E"/>
+                </a:solidFill>
+                <a:latin typeface="Microsoft YaHei"/>
+              </a:rPr>
+              <a:t>
+</a:t>
+            </a:r>
+            <a:r>
+              <a:rPr sz="1000" b="0" dirty="0" err="1">
+                <a:solidFill>
+                  <a:srgbClr val="63707E"/>
+                </a:solidFill>
+                <a:latin typeface="Microsoft YaHei"/>
+              </a:rPr>
+              <a:t>各输入参数的动态权重</a:t>
+            </a:r>
+            <a:r>
+              <a:rPr sz="1000" b="0" dirty="0">
+                <a:solidFill>
+                  <a:srgbClr val="63707E"/>
+                </a:solidFill>
+                <a:latin typeface="Microsoft YaHei"/>
+              </a:rPr>
+              <a:t> α</a:t>
             </a:r>
           </a:p>
         </p:txBody>
@@ -4239,7 +4251,7 @@
         </p:nvSpPr>
         <p:spPr>
           <a:xfrm>
-            <a:off x="8712000" y="2688981"/>
+            <a:off x="8442000" y="2649535"/>
             <a:ext cx="3096000" cy="251999"/>
           </a:xfrm>
           <a:prstGeom prst="rect">
@@ -4310,7 +4322,7 @@
         </p:nvCxnSpPr>
         <p:spPr>
           <a:xfrm>
-            <a:off x="2088000" y="1968980"/>
+            <a:off x="2088000" y="1714537"/>
             <a:ext cx="432000" cy="0"/>
           </a:xfrm>
           <a:prstGeom prst="line">
@@ -4345,7 +4357,7 @@
         </p:nvCxnSpPr>
         <p:spPr>
           <a:xfrm flipV="1">
-            <a:off x="4176000" y="1518981"/>
+            <a:off x="4176000" y="1264538"/>
             <a:ext cx="432000" cy="449999"/>
           </a:xfrm>
           <a:prstGeom prst="line">
@@ -4380,7 +4392,7 @@
         </p:nvCxnSpPr>
         <p:spPr>
           <a:xfrm>
-            <a:off x="4176000" y="1968980"/>
+            <a:off x="4176000" y="1714537"/>
             <a:ext cx="432000" cy="396001"/>
           </a:xfrm>
           <a:prstGeom prst="line">
@@ -4415,7 +4427,7 @@
         </p:nvCxnSpPr>
         <p:spPr>
           <a:xfrm>
-            <a:off x="6120000" y="1518981"/>
+            <a:off x="6120000" y="1264538"/>
             <a:ext cx="468000" cy="414000"/>
           </a:xfrm>
           <a:prstGeom prst="line">
@@ -4450,7 +4462,7 @@
         </p:nvCxnSpPr>
         <p:spPr>
           <a:xfrm flipV="1">
-            <a:off x="6120000" y="2004981"/>
+            <a:off x="6120000" y="1750538"/>
             <a:ext cx="468000" cy="360000"/>
           </a:xfrm>
           <a:prstGeom prst="line">
@@ -4485,7 +4497,7 @@
         </p:nvCxnSpPr>
         <p:spPr>
           <a:xfrm flipV="1">
-            <a:off x="8352000" y="1518981"/>
+            <a:off x="8352000" y="1264538"/>
             <a:ext cx="432000" cy="414000"/>
           </a:xfrm>
           <a:prstGeom prst="line">
@@ -4515,13 +4527,15 @@
       <p:cxnSp>
         <p:nvCxnSpPr>
           <p:cNvPr id="29" name="Connector 28"/>
-          <p:cNvCxnSpPr/>
+          <p:cNvCxnSpPr>
+            <a:cxnSpLocks/>
+          </p:cNvCxnSpPr>
           <p:nvPr/>
         </p:nvCxnSpPr>
         <p:spPr>
           <a:xfrm>
-            <a:off x="8352000" y="2004981"/>
-            <a:ext cx="432000" cy="360000"/>
+            <a:off x="6120000" y="2110538"/>
+            <a:ext cx="0" cy="486000"/>
           </a:xfrm>
           <a:prstGeom prst="line">
             <a:avLst/>
@@ -4550,13 +4564,15 @@
       <p:cxnSp>
         <p:nvCxnSpPr>
           <p:cNvPr id="30" name="Connector 29"/>
-          <p:cNvCxnSpPr/>
+          <p:cNvCxnSpPr>
+            <a:cxnSpLocks/>
+          </p:cNvCxnSpPr>
           <p:nvPr/>
         </p:nvCxnSpPr>
         <p:spPr>
-          <a:xfrm flipV="1">
-            <a:off x="10296000" y="1968980"/>
-            <a:ext cx="360000" cy="396001"/>
+          <a:xfrm>
+            <a:off x="6120000" y="2600952"/>
+            <a:ext cx="3240000" cy="0"/>
           </a:xfrm>
           <a:prstGeom prst="line">
             <a:avLst/>
@@ -4582,15 +4598,120 @@
           </a:fontRef>
         </p:style>
       </p:cxnSp>
-      <p:sp>
-        <p:nvSpPr>
-          <p:cNvPr id="31" name="Rounded Rectangle 30"/>
+      <p:cxnSp>
+        <p:nvCxnSpPr>
+          <p:cNvPr id="31" name="Connector 30"/>
+          <p:cNvCxnSpPr/>
+          <p:nvPr/>
+        </p:nvCxnSpPr>
+        <p:spPr>
+          <a:xfrm flipV="1">
+            <a:off x="9360000" y="2434538"/>
+            <a:ext cx="0" cy="162000"/>
+          </a:xfrm>
+          <a:prstGeom prst="line">
+            <a:avLst/>
+          </a:prstGeom>
+          <a:ln w="27940">
+            <a:solidFill>
+              <a:srgbClr val="78828E"/>
+            </a:solidFill>
+          </a:ln>
+        </p:spPr>
+        <p:style>
+          <a:lnRef idx="2">
+            <a:schemeClr val="accent1"/>
+          </a:lnRef>
+          <a:fillRef idx="0">
+            <a:schemeClr val="accent1"/>
+          </a:fillRef>
+          <a:effectRef idx="1">
+            <a:schemeClr val="accent1"/>
+          </a:effectRef>
+          <a:fontRef idx="minor">
+            <a:schemeClr val="tx1"/>
+          </a:fontRef>
+        </p:style>
+      </p:cxnSp>
+      <p:cxnSp>
+        <p:nvCxnSpPr>
+          <p:cNvPr id="32" name="Connector 31"/>
+          <p:cNvCxnSpPr/>
+          <p:nvPr/>
+        </p:nvCxnSpPr>
+        <p:spPr>
+          <a:xfrm>
+            <a:off x="9360000" y="1570538"/>
+            <a:ext cx="0" cy="233999"/>
+          </a:xfrm>
+          <a:prstGeom prst="line">
+            <a:avLst/>
+          </a:prstGeom>
+          <a:ln w="27940">
+            <a:solidFill>
+              <a:srgbClr val="78828E"/>
+            </a:solidFill>
+          </a:ln>
+        </p:spPr>
+        <p:style>
+          <a:lnRef idx="2">
+            <a:schemeClr val="accent1"/>
+          </a:lnRef>
+          <a:fillRef idx="0">
+            <a:schemeClr val="accent1"/>
+          </a:fillRef>
+          <a:effectRef idx="1">
+            <a:schemeClr val="accent1"/>
+          </a:effectRef>
+          <a:fontRef idx="minor">
+            <a:schemeClr val="tx1"/>
+          </a:fontRef>
+        </p:style>
+      </p:cxnSp>
+      <p:cxnSp>
+        <p:nvCxnSpPr>
+          <p:cNvPr id="33" name="Connector 32"/>
+          <p:cNvCxnSpPr/>
+          <p:nvPr/>
+        </p:nvCxnSpPr>
+        <p:spPr>
+          <a:xfrm flipV="1">
+            <a:off x="10296000" y="1714537"/>
+            <a:ext cx="360000" cy="396001"/>
+          </a:xfrm>
+          <a:prstGeom prst="line">
+            <a:avLst/>
+          </a:prstGeom>
+          <a:ln w="27940">
+            <a:solidFill>
+              <a:srgbClr val="78828E"/>
+            </a:solidFill>
+          </a:ln>
+        </p:spPr>
+        <p:style>
+          <a:lnRef idx="2">
+            <a:schemeClr val="accent1"/>
+          </a:lnRef>
+          <a:fillRef idx="0">
+            <a:schemeClr val="accent1"/>
+          </a:fillRef>
+          <a:effectRef idx="1">
+            <a:schemeClr val="accent1"/>
+          </a:effectRef>
+          <a:fontRef idx="minor">
+            <a:schemeClr val="tx1"/>
+          </a:fontRef>
+        </p:style>
+      </p:cxnSp>
+      <p:sp>
+        <p:nvSpPr>
+          <p:cNvPr id="34" name="Rounded Rectangle 33"/>
           <p:cNvSpPr/>
           <p:nvPr/>
         </p:nvSpPr>
         <p:spPr>
           <a:xfrm>
-            <a:off x="432000" y="3804980"/>
+            <a:off x="432000" y="3550537"/>
             <a:ext cx="2520000" cy="1655999"/>
           </a:xfrm>
           <a:prstGeom prst="roundRect">
@@ -4630,13 +4751,13 @@
       </p:sp>
       <p:sp>
         <p:nvSpPr>
-          <p:cNvPr id="32" name="TextBox 31"/>
+          <p:cNvPr id="35" name="TextBox 34"/>
           <p:cNvSpPr txBox="1"/>
           <p:nvPr/>
         </p:nvSpPr>
         <p:spPr>
           <a:xfrm>
-            <a:off x="576000" y="3930980"/>
+            <a:off x="576000" y="3676537"/>
             <a:ext cx="2232000" cy="216000"/>
           </a:xfrm>
           <a:prstGeom prst="rect">
@@ -4665,13 +4786,13 @@
       </p:sp>
       <p:sp>
         <p:nvSpPr>
-          <p:cNvPr id="33" name="TextBox 32"/>
+          <p:cNvPr id="36" name="TextBox 35"/>
           <p:cNvSpPr txBox="1"/>
           <p:nvPr/>
         </p:nvSpPr>
         <p:spPr>
           <a:xfrm>
-            <a:off x="576000" y="4200980"/>
+            <a:off x="576000" y="3946537"/>
             <a:ext cx="2232000" cy="1152000"/>
           </a:xfrm>
           <a:prstGeom prst="rect">
@@ -4687,28 +4808,118 @@
           <a:p>
             <a:pPr algn="l"/>
             <a:r>
-              <a:rPr sz="1100" b="0">
+              <a:rPr sz="1100" b="0" dirty="0">
                 <a:solidFill>
                   <a:srgbClr val="2E3842"/>
                 </a:solidFill>
                 <a:latin typeface="Microsoft YaHei"/>
               </a:rPr>
-              <a:t>1. 分类标签
-2. 连续指示曲线（Logits / 归一化曲线）
-3. 动态特征权重曲线 FA_alpha_*</a:t>
-            </a:r>
-          </a:p>
-        </p:txBody>
-      </p:sp>
-      <p:sp>
-        <p:nvSpPr>
-          <p:cNvPr id="34" name="Rounded Rectangle 33"/>
+              <a:t>1. </a:t>
+            </a:r>
+            <a:r>
+              <a:rPr sz="1100" b="0" dirty="0" err="1">
+                <a:solidFill>
+                  <a:srgbClr val="2E3842"/>
+                </a:solidFill>
+                <a:latin typeface="Microsoft YaHei"/>
+              </a:rPr>
+              <a:t>分类标签</a:t>
+            </a:r>
+            <a:r>
+              <a:rPr sz="1100" b="0" dirty="0">
+                <a:solidFill>
+                  <a:srgbClr val="2E3842"/>
+                </a:solidFill>
+                <a:latin typeface="Microsoft YaHei"/>
+              </a:rPr>
+              <a:t>
+2. </a:t>
+            </a:r>
+            <a:r>
+              <a:rPr sz="1100" b="0" dirty="0" err="1">
+                <a:solidFill>
+                  <a:srgbClr val="2E3842"/>
+                </a:solidFill>
+                <a:latin typeface="Microsoft YaHei"/>
+              </a:rPr>
+              <a:t>连续指示曲线（Logits</a:t>
+            </a:r>
+            <a:r>
+              <a:rPr sz="1100" b="0" dirty="0">
+                <a:solidFill>
+                  <a:srgbClr val="2E3842"/>
+                </a:solidFill>
+                <a:latin typeface="Microsoft YaHei"/>
+              </a:rPr>
+              <a:t> / </a:t>
+            </a:r>
+            <a:r>
+              <a:rPr sz="1100" b="0" dirty="0" err="1">
+                <a:solidFill>
+                  <a:srgbClr val="2E3842"/>
+                </a:solidFill>
+                <a:latin typeface="Microsoft YaHei"/>
+              </a:rPr>
+              <a:t>归一化曲线</a:t>
+            </a:r>
+            <a:r>
+              <a:rPr sz="1100" b="0" dirty="0">
+                <a:solidFill>
+                  <a:srgbClr val="2E3842"/>
+                </a:solidFill>
+                <a:latin typeface="Microsoft YaHei"/>
+              </a:rPr>
+              <a:t>）
+3. </a:t>
+            </a:r>
+            <a:r>
+              <a:rPr sz="1100" b="0" dirty="0" err="1">
+                <a:solidFill>
+                  <a:srgbClr val="2E3842"/>
+                </a:solidFill>
+                <a:latin typeface="Microsoft YaHei"/>
+              </a:rPr>
+              <a:t>动态特征权重曲线</a:t>
+            </a:r>
+            <a:r>
+              <a:rPr sz="1100" b="0" dirty="0">
+                <a:solidFill>
+                  <a:srgbClr val="2E3842"/>
+                </a:solidFill>
+                <a:latin typeface="Microsoft YaHei"/>
+              </a:rPr>
+              <a:t> </a:t>
+            </a:r>
+            <a:r>
+              <a:rPr sz="1100" b="0" dirty="0" err="1">
+                <a:solidFill>
+                  <a:srgbClr val="2E3842"/>
+                </a:solidFill>
+                <a:latin typeface="Microsoft YaHei"/>
+              </a:rPr>
+              <a:t>FA_alpha</a:t>
+            </a:r>
+            <a:r>
+              <a:rPr sz="1100" b="0" dirty="0">
+                <a:solidFill>
+                  <a:srgbClr val="2E3842"/>
+                </a:solidFill>
+                <a:latin typeface="Microsoft YaHei"/>
+              </a:rPr>
+              <a:t>_*</a:t>
+            </a:r>
+          </a:p>
+        </p:txBody>
+      </p:sp>
+      <p:sp>
+        <p:nvSpPr>
+          <p:cNvPr id="37" name="Rounded Rectangle 36"/>
           <p:cNvSpPr/>
           <p:nvPr/>
         </p:nvSpPr>
         <p:spPr>
           <a:xfrm>
-            <a:off x="3240000" y="3804980"/>
+            <a:off x="3240000" y="3550537"/>
             <a:ext cx="2988000" cy="1655999"/>
           </a:xfrm>
           <a:prstGeom prst="roundRect">
@@ -4748,13 +4959,13 @@
       </p:sp>
       <p:sp>
         <p:nvSpPr>
-          <p:cNvPr id="35" name="TextBox 34"/>
+          <p:cNvPr id="38" name="TextBox 37"/>
           <p:cNvSpPr txBox="1"/>
           <p:nvPr/>
         </p:nvSpPr>
         <p:spPr>
           <a:xfrm>
-            <a:off x="3384000" y="3930980"/>
+            <a:off x="3384000" y="3676537"/>
             <a:ext cx="2700000" cy="216000"/>
           </a:xfrm>
           <a:prstGeom prst="rect">
@@ -4783,13 +4994,13 @@
       </p:sp>
       <p:sp>
         <p:nvSpPr>
-          <p:cNvPr id="36" name="TextBox 35"/>
+          <p:cNvPr id="39" name="TextBox 38"/>
           <p:cNvSpPr txBox="1"/>
           <p:nvPr/>
         </p:nvSpPr>
         <p:spPr>
           <a:xfrm>
-            <a:off x="3384000" y="4200980"/>
+            <a:off x="3384000" y="3946537"/>
             <a:ext cx="2700000" cy="1152000"/>
           </a:xfrm>
           <a:prstGeom prst="rect">
@@ -4823,13 +5034,13 @@
       </p:sp>
       <p:sp>
         <p:nvSpPr>
-          <p:cNvPr id="37" name="Rounded Rectangle 36"/>
+          <p:cNvPr id="40" name="Rounded Rectangle 39"/>
           <p:cNvSpPr/>
           <p:nvPr/>
         </p:nvSpPr>
         <p:spPr>
           <a:xfrm>
-            <a:off x="6516000" y="3804980"/>
+            <a:off x="6516000" y="3550537"/>
             <a:ext cx="2448000" cy="1655999"/>
           </a:xfrm>
           <a:prstGeom prst="roundRect">
@@ -4869,13 +5080,13 @@
       </p:sp>
       <p:sp>
         <p:nvSpPr>
-          <p:cNvPr id="38" name="TextBox 37"/>
+          <p:cNvPr id="41" name="TextBox 40"/>
           <p:cNvSpPr txBox="1"/>
           <p:nvPr/>
         </p:nvSpPr>
         <p:spPr>
           <a:xfrm>
-            <a:off x="6660000" y="3930980"/>
+            <a:off x="6660000" y="3676537"/>
             <a:ext cx="2160000" cy="216000"/>
           </a:xfrm>
           <a:prstGeom prst="rect">
@@ -4904,13 +5115,13 @@
       </p:sp>
       <p:sp>
         <p:nvSpPr>
-          <p:cNvPr id="39" name="TextBox 38"/>
+          <p:cNvPr id="42" name="TextBox 41"/>
           <p:cNvSpPr txBox="1"/>
           <p:nvPr/>
         </p:nvSpPr>
         <p:spPr>
           <a:xfrm>
-            <a:off x="6660000" y="4200980"/>
+            <a:off x="6660000" y="3946537"/>
             <a:ext cx="2160000" cy="1152000"/>
           </a:xfrm>
           <a:prstGeom prst="rect">
@@ -4941,13 +5152,13 @@
       </p:sp>
       <p:sp>
         <p:nvSpPr>
-          <p:cNvPr id="40" name="Rounded Rectangle 39"/>
+          <p:cNvPr id="43" name="Rounded Rectangle 42"/>
           <p:cNvSpPr/>
           <p:nvPr/>
         </p:nvSpPr>
         <p:spPr>
           <a:xfrm>
-            <a:off x="9216000" y="3804980"/>
+            <a:off x="9216000" y="3550537"/>
             <a:ext cx="2556000" cy="1655999"/>
           </a:xfrm>
           <a:prstGeom prst="roundRect">
@@ -4987,13 +5198,13 @@
       </p:sp>
       <p:sp>
         <p:nvSpPr>
-          <p:cNvPr id="41" name="TextBox 40"/>
+          <p:cNvPr id="44" name="TextBox 43"/>
           <p:cNvSpPr txBox="1"/>
           <p:nvPr/>
         </p:nvSpPr>
         <p:spPr>
           <a:xfrm>
-            <a:off x="9360000" y="3930980"/>
+            <a:off x="9360000" y="3676537"/>
             <a:ext cx="2268000" cy="216000"/>
           </a:xfrm>
           <a:prstGeom prst="rect">
@@ -5022,13 +5233,13 @@
       </p:sp>
       <p:sp>
         <p:nvSpPr>
-          <p:cNvPr id="42" name="TextBox 41"/>
+          <p:cNvPr id="45" name="TextBox 44"/>
           <p:cNvSpPr txBox="1"/>
           <p:nvPr/>
         </p:nvSpPr>
         <p:spPr>
           <a:xfrm>
-            <a:off x="9360000" y="4200980"/>
+            <a:off x="9360000" y="3946537"/>
             <a:ext cx="2268000" cy="1152000"/>
           </a:xfrm>
           <a:prstGeom prst="rect">
@@ -5060,13 +5271,13 @@
       </p:sp>
       <p:sp>
         <p:nvSpPr>
-          <p:cNvPr id="43" name="TextBox 42"/>
+          <p:cNvPr id="46" name="TextBox 45"/>
           <p:cNvSpPr txBox="1"/>
           <p:nvPr/>
         </p:nvSpPr>
         <p:spPr>
           <a:xfrm>
-            <a:off x="432000" y="3480981"/>
+            <a:off x="432000" y="3226538"/>
             <a:ext cx="2160000" cy="180000"/>
           </a:xfrm>
           <a:prstGeom prst="rect">
@@ -5095,13 +5306,13 @@
       </p:sp>
       <p:sp>
         <p:nvSpPr>
-          <p:cNvPr id="44" name="TextBox 43"/>
+          <p:cNvPr id="47" name="TextBox 46"/>
           <p:cNvSpPr txBox="1"/>
           <p:nvPr/>
         </p:nvSpPr>
         <p:spPr>
           <a:xfrm>
-            <a:off x="432000" y="1122981"/>
+            <a:off x="432000" y="868538"/>
             <a:ext cx="2880000" cy="180000"/>
           </a:xfrm>
           <a:prstGeom prst="rect">
